--- a/UML und OOP mit Python.pptx
+++ b/UML und OOP mit Python.pptx
@@ -301,7 +301,7 @@
           <a:p>
             <a:fld id="{EDBEB72E-33EF-4FDE-AF24-3FE480097FCA}" type="datetimeFigureOut">
               <a:rPr lang="de-DE" smtClean="0"/>
-              <a:t>24.01.2025</a:t>
+              <a:t>07.07.2025</a:t>
             </a:fld>
             <a:endParaRPr lang="de-DE"/>
           </a:p>
@@ -499,7 +499,7 @@
           <a:p>
             <a:fld id="{EDBEB72E-33EF-4FDE-AF24-3FE480097FCA}" type="datetimeFigureOut">
               <a:rPr lang="de-DE" smtClean="0"/>
-              <a:t>24.01.2025</a:t>
+              <a:t>07.07.2025</a:t>
             </a:fld>
             <a:endParaRPr lang="de-DE"/>
           </a:p>
@@ -707,7 +707,7 @@
           <a:p>
             <a:fld id="{EDBEB72E-33EF-4FDE-AF24-3FE480097FCA}" type="datetimeFigureOut">
               <a:rPr lang="de-DE" smtClean="0"/>
-              <a:t>24.01.2025</a:t>
+              <a:t>07.07.2025</a:t>
             </a:fld>
             <a:endParaRPr lang="de-DE"/>
           </a:p>
@@ -920,7 +920,7 @@
           <a:p>
             <a:fld id="{EDBEB72E-33EF-4FDE-AF24-3FE480097FCA}" type="datetimeFigureOut">
               <a:rPr lang="de-DE" smtClean="0"/>
-              <a:t>24.01.2025</a:t>
+              <a:t>07.07.2025</a:t>
             </a:fld>
             <a:endParaRPr lang="de-DE"/>
           </a:p>
@@ -1299,7 +1299,7 @@
           <a:p>
             <a:fld id="{EDBEB72E-33EF-4FDE-AF24-3FE480097FCA}" type="datetimeFigureOut">
               <a:rPr lang="de-DE" smtClean="0"/>
-              <a:t>24.01.2025</a:t>
+              <a:t>07.07.2025</a:t>
             </a:fld>
             <a:endParaRPr lang="de-DE"/>
           </a:p>
@@ -1564,7 +1564,7 @@
           <a:p>
             <a:fld id="{EDBEB72E-33EF-4FDE-AF24-3FE480097FCA}" type="datetimeFigureOut">
               <a:rPr lang="de-DE" smtClean="0"/>
-              <a:t>24.01.2025</a:t>
+              <a:t>07.07.2025</a:t>
             </a:fld>
             <a:endParaRPr lang="de-DE"/>
           </a:p>
@@ -1976,7 +1976,7 @@
           <a:p>
             <a:fld id="{EDBEB72E-33EF-4FDE-AF24-3FE480097FCA}" type="datetimeFigureOut">
               <a:rPr lang="de-DE" smtClean="0"/>
-              <a:t>24.01.2025</a:t>
+              <a:t>07.07.2025</a:t>
             </a:fld>
             <a:endParaRPr lang="de-DE"/>
           </a:p>
@@ -2117,7 +2117,7 @@
           <a:p>
             <a:fld id="{EDBEB72E-33EF-4FDE-AF24-3FE480097FCA}" type="datetimeFigureOut">
               <a:rPr lang="de-DE" smtClean="0"/>
-              <a:t>24.01.2025</a:t>
+              <a:t>07.07.2025</a:t>
             </a:fld>
             <a:endParaRPr lang="de-DE"/>
           </a:p>
@@ -2230,7 +2230,7 @@
           <a:p>
             <a:fld id="{EDBEB72E-33EF-4FDE-AF24-3FE480097FCA}" type="datetimeFigureOut">
               <a:rPr lang="de-DE" smtClean="0"/>
-              <a:t>24.01.2025</a:t>
+              <a:t>07.07.2025</a:t>
             </a:fld>
             <a:endParaRPr lang="de-DE"/>
           </a:p>
@@ -2541,7 +2541,7 @@
           <a:p>
             <a:fld id="{EDBEB72E-33EF-4FDE-AF24-3FE480097FCA}" type="datetimeFigureOut">
               <a:rPr lang="de-DE" smtClean="0"/>
-              <a:t>24.01.2025</a:t>
+              <a:t>07.07.2025</a:t>
             </a:fld>
             <a:endParaRPr lang="de-DE"/>
           </a:p>
@@ -2829,7 +2829,7 @@
           <a:p>
             <a:fld id="{EDBEB72E-33EF-4FDE-AF24-3FE480097FCA}" type="datetimeFigureOut">
               <a:rPr lang="de-DE" smtClean="0"/>
-              <a:t>24.01.2025</a:t>
+              <a:t>07.07.2025</a:t>
             </a:fld>
             <a:endParaRPr lang="de-DE"/>
           </a:p>
@@ -3070,7 +3070,7 @@
           <a:p>
             <a:fld id="{EDBEB72E-33EF-4FDE-AF24-3FE480097FCA}" type="datetimeFigureOut">
               <a:rPr lang="de-DE" smtClean="0"/>
-              <a:t>24.01.2025</a:t>
+              <a:t>07.07.2025</a:t>
             </a:fld>
             <a:endParaRPr lang="de-DE"/>
           </a:p>
@@ -17727,20 +17727,12 @@
               <a:t> </a:t>
             </a:r>
             <a:r>
-              <a:rPr lang="de-DE" sz="1400" b="1" dirty="0" err="1">
-                <a:effectLst/>
-                <a:latin typeface="Courier New" panose="02070309020205020404" pitchFamily="49" charset="0"/>
-                <a:cs typeface="Courier New" panose="02070309020205020404" pitchFamily="49" charset="0"/>
-              </a:rPr>
-              <a:t>Einzelstueck</a:t>
-            </a:r>
-            <a:r>
               <a:rPr lang="de-DE" sz="1400" b="1" dirty="0">
                 <a:effectLst/>
                 <a:latin typeface="Courier New" panose="02070309020205020404" pitchFamily="49" charset="0"/>
                 <a:cs typeface="Courier New" panose="02070309020205020404" pitchFamily="49" charset="0"/>
               </a:rPr>
-              <a:t>:</a:t>
+              <a:t>Bibliothek:</a:t>
             </a:r>
           </a:p>
           <a:p>
@@ -17906,7 +17898,7 @@
                 <a:latin typeface="Courier New" panose="02070309020205020404" pitchFamily="49" charset="0"/>
                 <a:cs typeface="Courier New" panose="02070309020205020404" pitchFamily="49" charset="0"/>
               </a:rPr>
-              <a:t>Einzelstueck.instanzen</a:t>
+              <a:t>Bibliothek.instanzen</a:t>
             </a:r>
             <a:r>
               <a:rPr lang="de-DE" sz="1400" b="1" dirty="0">
@@ -17976,7 +17968,7 @@
                 <a:latin typeface="Courier New" panose="02070309020205020404" pitchFamily="49" charset="0"/>
                 <a:cs typeface="Courier New" panose="02070309020205020404" pitchFamily="49" charset="0"/>
               </a:rPr>
-              <a:t>Einzelstueck.instanzen</a:t>
+              <a:t>Bibliothek.instanzen</a:t>
             </a:r>
             <a:r>
               <a:rPr lang="de-DE" sz="1400" b="1" dirty="0">
@@ -18206,19 +18198,10 @@
           <a:p>
             <a:r>
               <a:rPr lang="de-DE" sz="1400" b="1" dirty="0">
-                <a:effectLst/>
-                <a:latin typeface="Courier New" panose="02070309020205020404" pitchFamily="49" charset="0"/>
-                <a:cs typeface="Courier New" panose="02070309020205020404" pitchFamily="49" charset="0"/>
-              </a:rPr>
-              <a:t>e1 = </a:t>
-            </a:r>
-            <a:r>
-              <a:rPr lang="de-DE" sz="1400" b="1" dirty="0" err="1">
-                <a:effectLst/>
-                <a:latin typeface="Courier New" panose="02070309020205020404" pitchFamily="49" charset="0"/>
-                <a:cs typeface="Courier New" panose="02070309020205020404" pitchFamily="49" charset="0"/>
-              </a:rPr>
-              <a:t>Einzelstueck</a:t>
+                <a:latin typeface="Courier New" panose="02070309020205020404" pitchFamily="49" charset="0"/>
+                <a:cs typeface="Courier New" panose="02070309020205020404" pitchFamily="49" charset="0"/>
+              </a:rPr>
+              <a:t>b</a:t>
             </a:r>
             <a:r>
               <a:rPr lang="de-DE" sz="1400" b="1" dirty="0">
@@ -18226,25 +18209,46 @@
                 <a:latin typeface="Courier New" panose="02070309020205020404" pitchFamily="49" charset="0"/>
                 <a:cs typeface="Courier New" panose="02070309020205020404" pitchFamily="49" charset="0"/>
               </a:rPr>
-              <a:t>()</a:t>
-            </a:r>
-          </a:p>
-          <a:p>
+              <a:t>1 = </a:t>
+            </a:r>
+            <a:r>
+              <a:rPr lang="de-DE" sz="1400" b="1" dirty="0">
+                <a:latin typeface="Courier New" panose="02070309020205020404" pitchFamily="49" charset="0"/>
+                <a:cs typeface="Courier New" panose="02070309020205020404" pitchFamily="49" charset="0"/>
+              </a:rPr>
+              <a:t>Bibliothek</a:t>
+            </a:r>
             <a:r>
               <a:rPr lang="de-DE" sz="1400" b="1" dirty="0">
                 <a:effectLst/>
                 <a:latin typeface="Courier New" panose="02070309020205020404" pitchFamily="49" charset="0"/>
                 <a:cs typeface="Courier New" panose="02070309020205020404" pitchFamily="49" charset="0"/>
               </a:rPr>
-              <a:t>e2 = </a:t>
-            </a:r>
-            <a:r>
-              <a:rPr lang="de-DE" sz="1400" b="1" dirty="0" err="1">
+              <a:t>()</a:t>
+            </a:r>
+          </a:p>
+          <a:p>
+            <a:r>
+              <a:rPr lang="de-DE" sz="1400" b="1" dirty="0">
+                <a:latin typeface="Courier New" panose="02070309020205020404" pitchFamily="49" charset="0"/>
+                <a:cs typeface="Courier New" panose="02070309020205020404" pitchFamily="49" charset="0"/>
+              </a:rPr>
+              <a:t>b</a:t>
+            </a:r>
+            <a:r>
+              <a:rPr lang="de-DE" sz="1400" b="1" dirty="0">
                 <a:effectLst/>
                 <a:latin typeface="Courier New" panose="02070309020205020404" pitchFamily="49" charset="0"/>
                 <a:cs typeface="Courier New" panose="02070309020205020404" pitchFamily="49" charset="0"/>
               </a:rPr>
-              <a:t>Einzelstueck</a:t>
+              <a:t>2 = </a:t>
+            </a:r>
+            <a:r>
+              <a:rPr lang="de-DE" sz="1400" b="1" dirty="0">
+                <a:latin typeface="Courier New" panose="02070309020205020404" pitchFamily="49" charset="0"/>
+                <a:cs typeface="Courier New" panose="02070309020205020404" pitchFamily="49" charset="0"/>
+              </a:rPr>
+              <a:t>Bibliothek</a:t>
             </a:r>
             <a:r>
               <a:rPr lang="de-DE" sz="1400" b="1" dirty="0">
@@ -18321,11 +18325,18 @@
             </a:r>
             <a:r>
               <a:rPr lang="de-DE" sz="1400" b="1" dirty="0" err="1">
+                <a:latin typeface="Courier New" panose="02070309020205020404" pitchFamily="49" charset="0"/>
+                <a:cs typeface="Courier New" panose="02070309020205020404" pitchFamily="49" charset="0"/>
+              </a:rPr>
+              <a:t>Bibliothek</a:t>
+            </a:r>
+            <a:r>
+              <a:rPr lang="de-DE" sz="1400" b="1" dirty="0" err="1">
                 <a:effectLst/>
                 <a:latin typeface="Courier New" panose="02070309020205020404" pitchFamily="49" charset="0"/>
                 <a:cs typeface="Courier New" panose="02070309020205020404" pitchFamily="49" charset="0"/>
               </a:rPr>
-              <a:t>Einzelstueck.instanzen</a:t>
+              <a:t>.instanzen</a:t>
             </a:r>
             <a:r>
               <a:rPr lang="de-DE" sz="1400" b="1" dirty="0">
@@ -19333,95 +19344,267 @@
           <a:lstStyle/>
           <a:p>
             <a:r>
-              <a:rPr lang="de-DE"/>
+              <a:rPr lang="de-DE" dirty="0"/>
               <a:t>Ein Iterator ist ein Objekt, bei dem man ohne Kenntnisse der inneren Struktur z.B. mit einer for-Schleife auf die Datenstruktur zugreifen kann, z.B. </a:t>
             </a:r>
             <a:r>
-              <a:rPr lang="de-DE" sz="2400" b="1">
-                <a:latin typeface="Courier New" panose="02070309020205020404" pitchFamily="49" charset="0"/>
-                <a:cs typeface="Courier New" panose="02070309020205020404" pitchFamily="49" charset="0"/>
-              </a:rPr>
-              <a:t>for element in myIterator:</a:t>
-            </a:r>
-          </a:p>
-          <a:p>
-            <a:r>
-              <a:rPr lang="de-DE"/>
+              <a:rPr lang="de-DE" sz="2400" b="1" dirty="0">
+                <a:latin typeface="Courier New" panose="02070309020205020404" pitchFamily="49" charset="0"/>
+                <a:cs typeface="Courier New" panose="02070309020205020404" pitchFamily="49" charset="0"/>
+              </a:rPr>
+              <a:t>for </a:t>
+            </a:r>
+            <a:r>
+              <a:rPr lang="de-DE" sz="2400" b="1" dirty="0" err="1">
+                <a:latin typeface="Courier New" panose="02070309020205020404" pitchFamily="49" charset="0"/>
+                <a:cs typeface="Courier New" panose="02070309020205020404" pitchFamily="49" charset="0"/>
+              </a:rPr>
+              <a:t>element</a:t>
+            </a:r>
+            <a:r>
+              <a:rPr lang="de-DE" sz="2400" b="1" dirty="0">
+                <a:latin typeface="Courier New" panose="02070309020205020404" pitchFamily="49" charset="0"/>
+                <a:cs typeface="Courier New" panose="02070309020205020404" pitchFamily="49" charset="0"/>
+              </a:rPr>
+              <a:t> in </a:t>
+            </a:r>
+            <a:r>
+              <a:rPr lang="de-DE" sz="2400" b="1" dirty="0" err="1">
+                <a:latin typeface="Courier New" panose="02070309020205020404" pitchFamily="49" charset="0"/>
+                <a:cs typeface="Courier New" panose="02070309020205020404" pitchFamily="49" charset="0"/>
+              </a:rPr>
+              <a:t>myIterator</a:t>
+            </a:r>
+            <a:r>
+              <a:rPr lang="de-DE" sz="2400" b="1" dirty="0">
+                <a:latin typeface="Courier New" panose="02070309020205020404" pitchFamily="49" charset="0"/>
+                <a:cs typeface="Courier New" panose="02070309020205020404" pitchFamily="49" charset="0"/>
+              </a:rPr>
+              <a:t>:</a:t>
+            </a:r>
+          </a:p>
+          <a:p>
+            <a:r>
+              <a:rPr lang="de-DE" dirty="0"/>
               <a:t>Ein bekannter Iterator ist des </a:t>
             </a:r>
             <a:r>
-              <a:rPr lang="de-DE" sz="2400" b="1">
+              <a:rPr lang="de-DE" sz="2400" b="1" dirty="0" err="1">
                 <a:latin typeface="Courier New" panose="02070309020205020404" pitchFamily="49" charset="0"/>
                 <a:cs typeface="Courier New" panose="02070309020205020404" pitchFamily="49" charset="0"/>
               </a:rPr>
               <a:t>cursor</a:t>
             </a:r>
             <a:r>
-              <a:rPr lang="de-DE"/>
-              <a:t> – Objekt vom mySQL-Connector</a:t>
-            </a:r>
-          </a:p>
-          <a:p>
-            <a:r>
-              <a:rPr lang="de-DE"/>
-              <a:t>Um selbst eine Iterator-Klasse zu entwerfen, benötigt die Klasse zwei "special functions":</a:t>
+              <a:rPr lang="de-DE" dirty="0"/>
+              <a:t> – Objekt vom </a:t>
+            </a:r>
+            <a:r>
+              <a:rPr lang="de-DE" dirty="0" err="1"/>
+              <a:t>mySQL</a:t>
+            </a:r>
+            <a:r>
+              <a:rPr lang="de-DE" dirty="0"/>
+              <a:t>-Connector</a:t>
+            </a:r>
+          </a:p>
+          <a:p>
+            <a:r>
+              <a:rPr lang="de-DE" dirty="0"/>
+              <a:t>Um selbst eine Iterator-Klasse zu entwerfen, benötigt die Klasse zwei "</a:t>
+            </a:r>
+            <a:r>
+              <a:rPr lang="de-DE" dirty="0" err="1"/>
+              <a:t>special</a:t>
+            </a:r>
+            <a:r>
+              <a:rPr lang="de-DE" dirty="0"/>
+              <a:t> </a:t>
+            </a:r>
+            <a:r>
+              <a:rPr lang="de-DE" dirty="0" err="1"/>
+              <a:t>functions</a:t>
+            </a:r>
+            <a:r>
+              <a:rPr lang="de-DE" dirty="0"/>
+              <a:t>":</a:t>
             </a:r>
           </a:p>
           <a:p>
             <a:pPr lvl="1"/>
             <a:r>
-              <a:rPr lang="de-DE" sz="2000" b="1">
-                <a:latin typeface="Courier New" panose="02070309020205020404" pitchFamily="49" charset="0"/>
-                <a:cs typeface="Courier New" panose="02070309020205020404" pitchFamily="49" charset="0"/>
-              </a:rPr>
-              <a:t>def __iter__(self):  </a:t>
-            </a:r>
-            <a:r>
-              <a:rPr lang="de-DE">
+              <a:rPr lang="de-DE" sz="2000" b="1" dirty="0" err="1">
+                <a:latin typeface="Courier New" panose="02070309020205020404" pitchFamily="49" charset="0"/>
+                <a:cs typeface="Courier New" panose="02070309020205020404" pitchFamily="49" charset="0"/>
+              </a:rPr>
+              <a:t>def</a:t>
+            </a:r>
+            <a:r>
+              <a:rPr lang="de-DE" sz="2000" b="1" dirty="0">
+                <a:latin typeface="Courier New" panose="02070309020205020404" pitchFamily="49" charset="0"/>
+                <a:cs typeface="Courier New" panose="02070309020205020404" pitchFamily="49" charset="0"/>
+              </a:rPr>
+              <a:t> __</a:t>
+            </a:r>
+            <a:r>
+              <a:rPr lang="de-DE" sz="2000" b="1" dirty="0" err="1">
+                <a:latin typeface="Courier New" panose="02070309020205020404" pitchFamily="49" charset="0"/>
+                <a:cs typeface="Courier New" panose="02070309020205020404" pitchFamily="49" charset="0"/>
+              </a:rPr>
+              <a:t>iter</a:t>
+            </a:r>
+            <a:r>
+              <a:rPr lang="de-DE" sz="2000" b="1" dirty="0">
+                <a:latin typeface="Courier New" panose="02070309020205020404" pitchFamily="49" charset="0"/>
+                <a:cs typeface="Courier New" panose="02070309020205020404" pitchFamily="49" charset="0"/>
+              </a:rPr>
+              <a:t>__(</a:t>
+            </a:r>
+            <a:r>
+              <a:rPr lang="de-DE" sz="2000" b="1" dirty="0" err="1">
+                <a:latin typeface="Courier New" panose="02070309020205020404" pitchFamily="49" charset="0"/>
+                <a:cs typeface="Courier New" panose="02070309020205020404" pitchFamily="49" charset="0"/>
+              </a:rPr>
+              <a:t>self</a:t>
+            </a:r>
+            <a:r>
+              <a:rPr lang="de-DE" sz="2000" b="1" dirty="0">
+                <a:latin typeface="Courier New" panose="02070309020205020404" pitchFamily="49" charset="0"/>
+                <a:cs typeface="Courier New" panose="02070309020205020404" pitchFamily="49" charset="0"/>
+              </a:rPr>
+              <a:t>):  </a:t>
+            </a:r>
+            <a:r>
+              <a:rPr lang="de-DE" dirty="0">
                 <a:sym typeface="Wingdings" panose="05000000000000000000" pitchFamily="2" charset="2"/>
               </a:rPr>
-              <a:t> Soll das Interator-Objekt zurückliefern, üblicherweise mit </a:t>
-            </a:r>
-            <a:r>
-              <a:rPr lang="de-DE" sz="2000" b="1">
-                <a:latin typeface="Courier New" panose="02070309020205020404" pitchFamily="49" charset="0"/>
-                <a:cs typeface="Courier New" panose="02070309020205020404" pitchFamily="49" charset="0"/>
+              <a:t> Soll das </a:t>
+            </a:r>
+            <a:r>
+              <a:rPr lang="de-DE" dirty="0" err="1">
                 <a:sym typeface="Wingdings" panose="05000000000000000000" pitchFamily="2" charset="2"/>
               </a:rPr>
-              <a:t>return self</a:t>
-            </a:r>
+              <a:t>Interator</a:t>
+            </a:r>
+            <a:r>
+              <a:rPr lang="de-DE" dirty="0">
+                <a:sym typeface="Wingdings" panose="05000000000000000000" pitchFamily="2" charset="2"/>
+              </a:rPr>
+              <a:t>-Objekt zurückliefern, üblicherweise mit </a:t>
+            </a:r>
+            <a:r>
+              <a:rPr lang="de-DE" sz="2000" b="1" dirty="0" err="1">
+                <a:latin typeface="Courier New" panose="02070309020205020404" pitchFamily="49" charset="0"/>
+                <a:cs typeface="Courier New" panose="02070309020205020404" pitchFamily="49" charset="0"/>
+                <a:sym typeface="Wingdings" panose="05000000000000000000" pitchFamily="2" charset="2"/>
+              </a:rPr>
+              <a:t>return</a:t>
+            </a:r>
+            <a:r>
+              <a:rPr lang="de-DE" sz="2000" b="1" dirty="0">
+                <a:latin typeface="Courier New" panose="02070309020205020404" pitchFamily="49" charset="0"/>
+                <a:cs typeface="Courier New" panose="02070309020205020404" pitchFamily="49" charset="0"/>
+                <a:sym typeface="Wingdings" panose="05000000000000000000" pitchFamily="2" charset="2"/>
+              </a:rPr>
+              <a:t> </a:t>
+            </a:r>
+            <a:r>
+              <a:rPr lang="de-DE" sz="2000" b="1" dirty="0" err="1">
+                <a:latin typeface="Courier New" panose="02070309020205020404" pitchFamily="49" charset="0"/>
+                <a:cs typeface="Courier New" panose="02070309020205020404" pitchFamily="49" charset="0"/>
+                <a:sym typeface="Wingdings" panose="05000000000000000000" pitchFamily="2" charset="2"/>
+              </a:rPr>
+              <a:t>self</a:t>
+            </a:r>
+            <a:endParaRPr lang="de-DE" sz="2000" b="1" dirty="0">
+              <a:latin typeface="Courier New" panose="02070309020205020404" pitchFamily="49" charset="0"/>
+              <a:cs typeface="Courier New" panose="02070309020205020404" pitchFamily="49" charset="0"/>
+              <a:sym typeface="Wingdings" panose="05000000000000000000" pitchFamily="2" charset="2"/>
+            </a:endParaRPr>
           </a:p>
           <a:p>
             <a:pPr lvl="1"/>
             <a:r>
-              <a:rPr lang="de-DE" sz="2000" b="1">
+              <a:rPr lang="de-DE" sz="2000" b="1" dirty="0" err="1">
                 <a:latin typeface="Courier New" panose="02070309020205020404" pitchFamily="49" charset="0"/>
                 <a:cs typeface="Courier New" panose="02070309020205020404" pitchFamily="49" charset="0"/>
                 <a:sym typeface="Wingdings" panose="05000000000000000000" pitchFamily="2" charset="2"/>
               </a:rPr>
-              <a:t>def __next__(self): </a:t>
-            </a:r>
-            <a:r>
-              <a:rPr lang="de-DE">
+              <a:t>def</a:t>
+            </a:r>
+            <a:r>
+              <a:rPr lang="de-DE" sz="2000" b="1" dirty="0">
+                <a:latin typeface="Courier New" panose="02070309020205020404" pitchFamily="49" charset="0"/>
+                <a:cs typeface="Courier New" panose="02070309020205020404" pitchFamily="49" charset="0"/>
                 <a:sym typeface="Wingdings" panose="05000000000000000000" pitchFamily="2" charset="2"/>
               </a:rPr>
-              <a:t> Soll das nächste Element des Iterators zurückliefern, und die Exception </a:t>
-            </a:r>
-            <a:r>
-              <a:rPr lang="de-DE" b="1">
+              <a:t> __</a:t>
+            </a:r>
+            <a:r>
+              <a:rPr lang="de-DE" sz="2000" b="1" dirty="0" err="1">
                 <a:latin typeface="Courier New" panose="02070309020205020404" pitchFamily="49" charset="0"/>
                 <a:cs typeface="Courier New" panose="02070309020205020404" pitchFamily="49" charset="0"/>
                 <a:sym typeface="Wingdings" panose="05000000000000000000" pitchFamily="2" charset="2"/>
               </a:rPr>
+              <a:t>next</a:t>
+            </a:r>
+            <a:r>
+              <a:rPr lang="de-DE" sz="2000" b="1" dirty="0">
+                <a:latin typeface="Courier New" panose="02070309020205020404" pitchFamily="49" charset="0"/>
+                <a:cs typeface="Courier New" panose="02070309020205020404" pitchFamily="49" charset="0"/>
+                <a:sym typeface="Wingdings" panose="05000000000000000000" pitchFamily="2" charset="2"/>
+              </a:rPr>
+              <a:t>__(</a:t>
+            </a:r>
+            <a:r>
+              <a:rPr lang="de-DE" sz="2000" b="1" dirty="0" err="1">
+                <a:latin typeface="Courier New" panose="02070309020205020404" pitchFamily="49" charset="0"/>
+                <a:cs typeface="Courier New" panose="02070309020205020404" pitchFamily="49" charset="0"/>
+                <a:sym typeface="Wingdings" panose="05000000000000000000" pitchFamily="2" charset="2"/>
+              </a:rPr>
+              <a:t>self</a:t>
+            </a:r>
+            <a:r>
+              <a:rPr lang="de-DE" sz="2000" b="1" dirty="0">
+                <a:latin typeface="Courier New" panose="02070309020205020404" pitchFamily="49" charset="0"/>
+                <a:cs typeface="Courier New" panose="02070309020205020404" pitchFamily="49" charset="0"/>
+                <a:sym typeface="Wingdings" panose="05000000000000000000" pitchFamily="2" charset="2"/>
+              </a:rPr>
+              <a:t>): </a:t>
+            </a:r>
+            <a:r>
+              <a:rPr lang="de-DE" dirty="0">
+                <a:sym typeface="Wingdings" panose="05000000000000000000" pitchFamily="2" charset="2"/>
+              </a:rPr>
+              <a:t> Soll das nächste Element des Iterators zurückliefern, und die </a:t>
+            </a:r>
+            <a:r>
+              <a:rPr lang="de-DE" dirty="0" err="1">
+                <a:sym typeface="Wingdings" panose="05000000000000000000" pitchFamily="2" charset="2"/>
+              </a:rPr>
+              <a:t>Exception</a:t>
+            </a:r>
+            <a:r>
+              <a:rPr lang="de-DE" dirty="0">
+                <a:sym typeface="Wingdings" panose="05000000000000000000" pitchFamily="2" charset="2"/>
+              </a:rPr>
+              <a:t> </a:t>
+            </a:r>
+            <a:r>
+              <a:rPr lang="de-DE" b="1" dirty="0" err="1">
+                <a:latin typeface="Courier New" panose="02070309020205020404" pitchFamily="49" charset="0"/>
+                <a:cs typeface="Courier New" panose="02070309020205020404" pitchFamily="49" charset="0"/>
+                <a:sym typeface="Wingdings" panose="05000000000000000000" pitchFamily="2" charset="2"/>
+              </a:rPr>
               <a:t>StopIteration</a:t>
             </a:r>
             <a:r>
-              <a:rPr lang="de-DE">
+              <a:rPr lang="de-DE" dirty="0">
                 <a:sym typeface="Wingdings" panose="05000000000000000000" pitchFamily="2" charset="2"/>
               </a:rPr>
               <a:t>, wenn es kein nächstes Element mehr gibt.</a:t>
             </a:r>
-            <a:endParaRPr lang="de-DE"/>
+            <a:endParaRPr lang="de-DE" dirty="0"/>
           </a:p>
         </p:txBody>
       </p:sp>

--- a/UML und OOP mit Python.pptx
+++ b/UML und OOP mit Python.pptx
@@ -301,7 +301,7 @@
           <a:p>
             <a:fld id="{EDBEB72E-33EF-4FDE-AF24-3FE480097FCA}" type="datetimeFigureOut">
               <a:rPr lang="de-DE" smtClean="0"/>
-              <a:t>07.07.2025</a:t>
+              <a:t>13.01.2026</a:t>
             </a:fld>
             <a:endParaRPr lang="de-DE"/>
           </a:p>
@@ -499,7 +499,7 @@
           <a:p>
             <a:fld id="{EDBEB72E-33EF-4FDE-AF24-3FE480097FCA}" type="datetimeFigureOut">
               <a:rPr lang="de-DE" smtClean="0"/>
-              <a:t>07.07.2025</a:t>
+              <a:t>13.01.2026</a:t>
             </a:fld>
             <a:endParaRPr lang="de-DE"/>
           </a:p>
@@ -707,7 +707,7 @@
           <a:p>
             <a:fld id="{EDBEB72E-33EF-4FDE-AF24-3FE480097FCA}" type="datetimeFigureOut">
               <a:rPr lang="de-DE" smtClean="0"/>
-              <a:t>07.07.2025</a:t>
+              <a:t>13.01.2026</a:t>
             </a:fld>
             <a:endParaRPr lang="de-DE"/>
           </a:p>
@@ -920,7 +920,7 @@
           <a:p>
             <a:fld id="{EDBEB72E-33EF-4FDE-AF24-3FE480097FCA}" type="datetimeFigureOut">
               <a:rPr lang="de-DE" smtClean="0"/>
-              <a:t>07.07.2025</a:t>
+              <a:t>13.01.2026</a:t>
             </a:fld>
             <a:endParaRPr lang="de-DE"/>
           </a:p>
@@ -1299,7 +1299,7 @@
           <a:p>
             <a:fld id="{EDBEB72E-33EF-4FDE-AF24-3FE480097FCA}" type="datetimeFigureOut">
               <a:rPr lang="de-DE" smtClean="0"/>
-              <a:t>07.07.2025</a:t>
+              <a:t>13.01.2026</a:t>
             </a:fld>
             <a:endParaRPr lang="de-DE"/>
           </a:p>
@@ -1564,7 +1564,7 @@
           <a:p>
             <a:fld id="{EDBEB72E-33EF-4FDE-AF24-3FE480097FCA}" type="datetimeFigureOut">
               <a:rPr lang="de-DE" smtClean="0"/>
-              <a:t>07.07.2025</a:t>
+              <a:t>13.01.2026</a:t>
             </a:fld>
             <a:endParaRPr lang="de-DE"/>
           </a:p>
@@ -1976,7 +1976,7 @@
           <a:p>
             <a:fld id="{EDBEB72E-33EF-4FDE-AF24-3FE480097FCA}" type="datetimeFigureOut">
               <a:rPr lang="de-DE" smtClean="0"/>
-              <a:t>07.07.2025</a:t>
+              <a:t>13.01.2026</a:t>
             </a:fld>
             <a:endParaRPr lang="de-DE"/>
           </a:p>
@@ -2117,7 +2117,7 @@
           <a:p>
             <a:fld id="{EDBEB72E-33EF-4FDE-AF24-3FE480097FCA}" type="datetimeFigureOut">
               <a:rPr lang="de-DE" smtClean="0"/>
-              <a:t>07.07.2025</a:t>
+              <a:t>13.01.2026</a:t>
             </a:fld>
             <a:endParaRPr lang="de-DE"/>
           </a:p>
@@ -2230,7 +2230,7 @@
           <a:p>
             <a:fld id="{EDBEB72E-33EF-4FDE-AF24-3FE480097FCA}" type="datetimeFigureOut">
               <a:rPr lang="de-DE" smtClean="0"/>
-              <a:t>07.07.2025</a:t>
+              <a:t>13.01.2026</a:t>
             </a:fld>
             <a:endParaRPr lang="de-DE"/>
           </a:p>
@@ -2541,7 +2541,7 @@
           <a:p>
             <a:fld id="{EDBEB72E-33EF-4FDE-AF24-3FE480097FCA}" type="datetimeFigureOut">
               <a:rPr lang="de-DE" smtClean="0"/>
-              <a:t>07.07.2025</a:t>
+              <a:t>13.01.2026</a:t>
             </a:fld>
             <a:endParaRPr lang="de-DE"/>
           </a:p>
@@ -2829,7 +2829,7 @@
           <a:p>
             <a:fld id="{EDBEB72E-33EF-4FDE-AF24-3FE480097FCA}" type="datetimeFigureOut">
               <a:rPr lang="de-DE" smtClean="0"/>
-              <a:t>07.07.2025</a:t>
+              <a:t>13.01.2026</a:t>
             </a:fld>
             <a:endParaRPr lang="de-DE"/>
           </a:p>
@@ -3070,7 +3070,7 @@
           <a:p>
             <a:fld id="{EDBEB72E-33EF-4FDE-AF24-3FE480097FCA}" type="datetimeFigureOut">
               <a:rPr lang="de-DE" smtClean="0"/>
-              <a:t>07.07.2025</a:t>
+              <a:t>13.01.2026</a:t>
             </a:fld>
             <a:endParaRPr lang="de-DE"/>
           </a:p>
@@ -3747,15 +3747,7 @@
             <a:pPr lvl="1"/>
             <a:r>
               <a:rPr lang="de-DE" dirty="0"/>
-              <a:t>Objekte repräsentieren Dinge aus der realen Welt die im Programm abgebildet werden (z.B. Der Kunde "Meier", eine bestimmte Bestellung, ein </a:t>
-            </a:r>
-            <a:r>
-              <a:rPr lang="de-DE" dirty="0" err="1"/>
-              <a:t>komkretes</a:t>
-            </a:r>
-            <a:r>
-              <a:rPr lang="de-DE" dirty="0"/>
-              <a:t> Produkt, ein Schüler, eine Schulklasse, Ein bestimmtes Fahrzeug in der Fahrzeugverwaltung, eine Bestellposition, Eine Konto, Eine Transaktion)</a:t>
+              <a:t>Objekte repräsentieren Dinge aus der realen Welt, die im Programm abgebildet werden (z.B. Der Kunde "Meier", eine bestimmte Bestellung, ein konkretes Produkt, ein Schüler, eine Schulklasse, Ein bestimmtes Fahrzeug in der Fahrzeugverwaltung, eine Bestellposition, ein Konto, eine Transaktion)</a:t>
             </a:r>
           </a:p>
           <a:p>
@@ -3870,7 +3862,7 @@
             </a:r>
             <a:r>
               <a:rPr lang="de-DE" dirty="0"/>
-              <a:t> (Class)</a:t>
+              <a:t> (Class). Ohne eine Klasse kann man keine Objekte erzeugen!</a:t>
             </a:r>
           </a:p>
         </p:txBody>
@@ -3975,7 +3967,7 @@
           <a:p>
             <a:r>
               <a:rPr lang="de-DE" dirty="0"/>
-              <a:t>Die Klasse beschreibt sämtliche Methoden und Attribute die das Objekt bekommt. In den meisten Programmiersprachen kann man dabei Zugriffsmodifikatoren </a:t>
+              <a:t>Die Klasse beschreibt sämtliche Methoden und Attribute, die das Objekt bekommt. In den meisten Programmiersprachen kann man dabei Zugriffsmodifikatoren </a:t>
             </a:r>
             <a:r>
               <a:rPr lang="de-DE" b="1" dirty="0"/>

--- a/UML und OOP mit Python.pptx
+++ b/UML und OOP mit Python.pptx
@@ -301,7 +301,7 @@
           <a:p>
             <a:fld id="{EDBEB72E-33EF-4FDE-AF24-3FE480097FCA}" type="datetimeFigureOut">
               <a:rPr lang="de-DE" smtClean="0"/>
-              <a:t>13.01.2026</a:t>
+              <a:t>21.01.2026</a:t>
             </a:fld>
             <a:endParaRPr lang="de-DE"/>
           </a:p>
@@ -499,7 +499,7 @@
           <a:p>
             <a:fld id="{EDBEB72E-33EF-4FDE-AF24-3FE480097FCA}" type="datetimeFigureOut">
               <a:rPr lang="de-DE" smtClean="0"/>
-              <a:t>13.01.2026</a:t>
+              <a:t>21.01.2026</a:t>
             </a:fld>
             <a:endParaRPr lang="de-DE"/>
           </a:p>
@@ -707,7 +707,7 @@
           <a:p>
             <a:fld id="{EDBEB72E-33EF-4FDE-AF24-3FE480097FCA}" type="datetimeFigureOut">
               <a:rPr lang="de-DE" smtClean="0"/>
-              <a:t>13.01.2026</a:t>
+              <a:t>21.01.2026</a:t>
             </a:fld>
             <a:endParaRPr lang="de-DE"/>
           </a:p>
@@ -920,7 +920,7 @@
           <a:p>
             <a:fld id="{EDBEB72E-33EF-4FDE-AF24-3FE480097FCA}" type="datetimeFigureOut">
               <a:rPr lang="de-DE" smtClean="0"/>
-              <a:t>13.01.2026</a:t>
+              <a:t>21.01.2026</a:t>
             </a:fld>
             <a:endParaRPr lang="de-DE"/>
           </a:p>
@@ -1299,7 +1299,7 @@
           <a:p>
             <a:fld id="{EDBEB72E-33EF-4FDE-AF24-3FE480097FCA}" type="datetimeFigureOut">
               <a:rPr lang="de-DE" smtClean="0"/>
-              <a:t>13.01.2026</a:t>
+              <a:t>21.01.2026</a:t>
             </a:fld>
             <a:endParaRPr lang="de-DE"/>
           </a:p>
@@ -1564,7 +1564,7 @@
           <a:p>
             <a:fld id="{EDBEB72E-33EF-4FDE-AF24-3FE480097FCA}" type="datetimeFigureOut">
               <a:rPr lang="de-DE" smtClean="0"/>
-              <a:t>13.01.2026</a:t>
+              <a:t>21.01.2026</a:t>
             </a:fld>
             <a:endParaRPr lang="de-DE"/>
           </a:p>
@@ -1976,7 +1976,7 @@
           <a:p>
             <a:fld id="{EDBEB72E-33EF-4FDE-AF24-3FE480097FCA}" type="datetimeFigureOut">
               <a:rPr lang="de-DE" smtClean="0"/>
-              <a:t>13.01.2026</a:t>
+              <a:t>21.01.2026</a:t>
             </a:fld>
             <a:endParaRPr lang="de-DE"/>
           </a:p>
@@ -2117,7 +2117,7 @@
           <a:p>
             <a:fld id="{EDBEB72E-33EF-4FDE-AF24-3FE480097FCA}" type="datetimeFigureOut">
               <a:rPr lang="de-DE" smtClean="0"/>
-              <a:t>13.01.2026</a:t>
+              <a:t>21.01.2026</a:t>
             </a:fld>
             <a:endParaRPr lang="de-DE"/>
           </a:p>
@@ -2230,7 +2230,7 @@
           <a:p>
             <a:fld id="{EDBEB72E-33EF-4FDE-AF24-3FE480097FCA}" type="datetimeFigureOut">
               <a:rPr lang="de-DE" smtClean="0"/>
-              <a:t>13.01.2026</a:t>
+              <a:t>21.01.2026</a:t>
             </a:fld>
             <a:endParaRPr lang="de-DE"/>
           </a:p>
@@ -2541,7 +2541,7 @@
           <a:p>
             <a:fld id="{EDBEB72E-33EF-4FDE-AF24-3FE480097FCA}" type="datetimeFigureOut">
               <a:rPr lang="de-DE" smtClean="0"/>
-              <a:t>13.01.2026</a:t>
+              <a:t>21.01.2026</a:t>
             </a:fld>
             <a:endParaRPr lang="de-DE"/>
           </a:p>
@@ -2829,7 +2829,7 @@
           <a:p>
             <a:fld id="{EDBEB72E-33EF-4FDE-AF24-3FE480097FCA}" type="datetimeFigureOut">
               <a:rPr lang="de-DE" smtClean="0"/>
-              <a:t>13.01.2026</a:t>
+              <a:t>21.01.2026</a:t>
             </a:fld>
             <a:endParaRPr lang="de-DE"/>
           </a:p>
@@ -3070,7 +3070,7 @@
           <a:p>
             <a:fld id="{EDBEB72E-33EF-4FDE-AF24-3FE480097FCA}" type="datetimeFigureOut">
               <a:rPr lang="de-DE" smtClean="0"/>
-              <a:t>13.01.2026</a:t>
+              <a:t>21.01.2026</a:t>
             </a:fld>
             <a:endParaRPr lang="de-DE"/>
           </a:p>
@@ -13386,6 +13386,43 @@
           </a:extLst>
         </p:spPr>
       </p:pic>
+      <p:sp>
+        <p:nvSpPr>
+          <p:cNvPr id="5" name="Textfeld 4">
+            <a:extLst>
+              <a:ext uri="{FF2B5EF4-FFF2-40B4-BE49-F238E27FC236}">
+                <a16:creationId xmlns:a16="http://schemas.microsoft.com/office/drawing/2014/main" id="{FDABDE1E-6591-B4CC-E6B1-B21FD632711F}"/>
+              </a:ext>
+            </a:extLst>
+          </p:cNvPr>
+          <p:cNvSpPr txBox="1"/>
+          <p:nvPr/>
+        </p:nvSpPr>
+        <p:spPr>
+          <a:xfrm>
+            <a:off x="10788650" y="3943350"/>
+            <a:ext cx="399468" cy="261610"/>
+          </a:xfrm>
+          <a:prstGeom prst="rect">
+            <a:avLst/>
+          </a:prstGeom>
+          <a:solidFill>
+            <a:schemeClr val="bg1"/>
+          </a:solidFill>
+        </p:spPr>
+        <p:txBody>
+          <a:bodyPr wrap="none" rtlCol="0">
+            <a:spAutoFit/>
+          </a:bodyPr>
+          <a:lstStyle/>
+          <a:p>
+            <a:r>
+              <a:rPr lang="de-DE" sz="1100" dirty="0"/>
+              <a:t>0..1</a:t>
+            </a:r>
+          </a:p>
+        </p:txBody>
+      </p:sp>
     </p:spTree>
     <p:extLst>
       <p:ext uri="{BB962C8B-B14F-4D97-AF65-F5344CB8AC3E}">
